--- a/ppt-gtsebrae/G5-Ana-Lúcia.pptx
+++ b/ppt-gtsebrae/G5-Ana-Lúcia.pptx
@@ -864,7 +864,7 @@
         </p:nvSpPr>
         <p:spPr>
           <a:xfrm>
-            <a:off x="381300" y="685800"/>
+            <a:off x="381000" y="685800"/>
             <a:ext cx="6096000" cy="3429000"/>
           </a:xfrm>
           <a:custGeom>
@@ -1280,7 +1280,7 @@
         </p:nvSpPr>
         <p:spPr>
           <a:xfrm>
-            <a:off x="381300" y="685800"/>
+            <a:off x="381000" y="685800"/>
             <a:ext cx="6096000" cy="3429000"/>
           </a:xfrm>
           <a:custGeom>
@@ -1696,7 +1696,7 @@
         </p:nvSpPr>
         <p:spPr>
           <a:xfrm>
-            <a:off x="381300" y="685800"/>
+            <a:off x="381000" y="685800"/>
             <a:ext cx="6096000" cy="3429000"/>
           </a:xfrm>
           <a:custGeom>
@@ -1904,7 +1904,7 @@
         </p:nvSpPr>
         <p:spPr>
           <a:xfrm>
-            <a:off x="381300" y="685800"/>
+            <a:off x="381000" y="685800"/>
             <a:ext cx="6096000" cy="3429000"/>
           </a:xfrm>
           <a:custGeom>
@@ -2216,7 +2216,7 @@
         </p:nvSpPr>
         <p:spPr>
           <a:xfrm>
-            <a:off x="381300" y="685800"/>
+            <a:off x="381000" y="685800"/>
             <a:ext cx="6096000" cy="3429000"/>
           </a:xfrm>
           <a:custGeom>
@@ -2632,7 +2632,7 @@
         </p:nvSpPr>
         <p:spPr>
           <a:xfrm>
-            <a:off x="381300" y="685800"/>
+            <a:off x="381000" y="685800"/>
             <a:ext cx="6096000" cy="3429000"/>
           </a:xfrm>
           <a:custGeom>
@@ -7836,6 +7836,36 @@
           <a:chExt cx="0" cy="0"/>
         </a:xfrm>
       </p:grpSpPr>
+      <p:pic>
+        <p:nvPicPr>
+          <p:cNvPr id="3" name="Picture 2">
+            <a:extLst>
+              <a:ext uri="{FF2B5EF4-FFF2-40B4-BE49-F238E27FC236}">
+                <a16:creationId xmlns:a16="http://schemas.microsoft.com/office/drawing/2014/main" id="{1BCA9672-D4AB-5B19-918C-674F5067811E}"/>
+              </a:ext>
+            </a:extLst>
+          </p:cNvPr>
+          <p:cNvPicPr>
+            <a:picLocks noChangeAspect="1"/>
+          </p:cNvPicPr>
+          <p:nvPr/>
+        </p:nvPicPr>
+        <p:blipFill>
+          <a:blip r:embed="rId4"/>
+          <a:stretch>
+            <a:fillRect/>
+          </a:stretch>
+        </p:blipFill>
+        <p:spPr>
+          <a:xfrm>
+            <a:off x="6707903" y="144816"/>
+            <a:ext cx="2263537" cy="488784"/>
+          </a:xfrm>
+          <a:prstGeom prst="rect">
+            <a:avLst/>
+          </a:prstGeom>
+        </p:spPr>
+      </p:pic>
     </p:spTree>
   </p:cSld>
   <p:clrMapOvr>
@@ -8568,6 +8598,36 @@
           <a:chExt cx="0" cy="0"/>
         </a:xfrm>
       </p:grpSpPr>
+      <p:pic>
+        <p:nvPicPr>
+          <p:cNvPr id="3" name="Picture 2">
+            <a:extLst>
+              <a:ext uri="{FF2B5EF4-FFF2-40B4-BE49-F238E27FC236}">
+                <a16:creationId xmlns:a16="http://schemas.microsoft.com/office/drawing/2014/main" id="{5657D988-8835-1B6B-A0B2-52FA92519927}"/>
+              </a:ext>
+            </a:extLst>
+          </p:cNvPr>
+          <p:cNvPicPr>
+            <a:picLocks noChangeAspect="1"/>
+          </p:cNvPicPr>
+          <p:nvPr/>
+        </p:nvPicPr>
+        <p:blipFill>
+          <a:blip r:embed="rId4"/>
+          <a:stretch>
+            <a:fillRect/>
+          </a:stretch>
+        </p:blipFill>
+        <p:spPr>
+          <a:xfrm>
+            <a:off x="6707903" y="144816"/>
+            <a:ext cx="2263537" cy="488784"/>
+          </a:xfrm>
+          <a:prstGeom prst="rect">
+            <a:avLst/>
+          </a:prstGeom>
+        </p:spPr>
+      </p:pic>
     </p:spTree>
   </p:cSld>
   <p:clrMapOvr>
@@ -9300,6 +9360,36 @@
           <a:chExt cx="0" cy="0"/>
         </a:xfrm>
       </p:grpSpPr>
+      <p:pic>
+        <p:nvPicPr>
+          <p:cNvPr id="3" name="Picture 2">
+            <a:extLst>
+              <a:ext uri="{FF2B5EF4-FFF2-40B4-BE49-F238E27FC236}">
+                <a16:creationId xmlns:a16="http://schemas.microsoft.com/office/drawing/2014/main" id="{04F5F1F5-1E53-F17D-8CE1-61E6BBC14C36}"/>
+              </a:ext>
+            </a:extLst>
+          </p:cNvPr>
+          <p:cNvPicPr>
+            <a:picLocks noChangeAspect="1"/>
+          </p:cNvPicPr>
+          <p:nvPr/>
+        </p:nvPicPr>
+        <p:blipFill>
+          <a:blip r:embed="rId4"/>
+          <a:stretch>
+            <a:fillRect/>
+          </a:stretch>
+        </p:blipFill>
+        <p:spPr>
+          <a:xfrm>
+            <a:off x="6707903" y="144816"/>
+            <a:ext cx="2263537" cy="488784"/>
+          </a:xfrm>
+          <a:prstGeom prst="rect">
+            <a:avLst/>
+          </a:prstGeom>
+        </p:spPr>
+      </p:pic>
     </p:spTree>
   </p:cSld>
   <p:clrMapOvr>
@@ -9376,6 +9466,36 @@
           <a:chExt cx="0" cy="0"/>
         </a:xfrm>
       </p:grpSpPr>
+      <p:pic>
+        <p:nvPicPr>
+          <p:cNvPr id="3" name="Picture 2">
+            <a:extLst>
+              <a:ext uri="{FF2B5EF4-FFF2-40B4-BE49-F238E27FC236}">
+                <a16:creationId xmlns:a16="http://schemas.microsoft.com/office/drawing/2014/main" id="{686D7BA6-E80B-313D-450B-B0D047F8B5DB}"/>
+              </a:ext>
+            </a:extLst>
+          </p:cNvPr>
+          <p:cNvPicPr>
+            <a:picLocks noChangeAspect="1"/>
+          </p:cNvPicPr>
+          <p:nvPr/>
+        </p:nvPicPr>
+        <p:blipFill>
+          <a:blip r:embed="rId4"/>
+          <a:stretch>
+            <a:fillRect/>
+          </a:stretch>
+        </p:blipFill>
+        <p:spPr>
+          <a:xfrm>
+            <a:off x="6707903" y="144816"/>
+            <a:ext cx="2263537" cy="488784"/>
+          </a:xfrm>
+          <a:prstGeom prst="rect">
+            <a:avLst/>
+          </a:prstGeom>
+        </p:spPr>
+      </p:pic>
     </p:spTree>
   </p:cSld>
   <p:clrMapOvr>
@@ -10070,6 +10190,36 @@
           <a:chExt cx="0" cy="0"/>
         </a:xfrm>
       </p:grpSpPr>
+      <p:pic>
+        <p:nvPicPr>
+          <p:cNvPr id="3" name="Picture 2">
+            <a:extLst>
+              <a:ext uri="{FF2B5EF4-FFF2-40B4-BE49-F238E27FC236}">
+                <a16:creationId xmlns:a16="http://schemas.microsoft.com/office/drawing/2014/main" id="{65062356-F2BE-5E2A-68E3-5F67CDE1EAAE}"/>
+              </a:ext>
+            </a:extLst>
+          </p:cNvPr>
+          <p:cNvPicPr>
+            <a:picLocks noChangeAspect="1"/>
+          </p:cNvPicPr>
+          <p:nvPr/>
+        </p:nvPicPr>
+        <p:blipFill>
+          <a:blip r:embed="rId4"/>
+          <a:stretch>
+            <a:fillRect/>
+          </a:stretch>
+        </p:blipFill>
+        <p:spPr>
+          <a:xfrm>
+            <a:off x="6707903" y="144816"/>
+            <a:ext cx="2263537" cy="488784"/>
+          </a:xfrm>
+          <a:prstGeom prst="rect">
+            <a:avLst/>
+          </a:prstGeom>
+        </p:spPr>
+      </p:pic>
     </p:spTree>
   </p:cSld>
   <p:clrMapOvr>
@@ -10802,6 +10952,36 @@
           <a:chExt cx="0" cy="0"/>
         </a:xfrm>
       </p:grpSpPr>
+      <p:pic>
+        <p:nvPicPr>
+          <p:cNvPr id="3" name="Picture 2">
+            <a:extLst>
+              <a:ext uri="{FF2B5EF4-FFF2-40B4-BE49-F238E27FC236}">
+                <a16:creationId xmlns:a16="http://schemas.microsoft.com/office/drawing/2014/main" id="{D3DCFD40-E863-636C-EE6F-B2550B48C8FB}"/>
+              </a:ext>
+            </a:extLst>
+          </p:cNvPr>
+          <p:cNvPicPr>
+            <a:picLocks noChangeAspect="1"/>
+          </p:cNvPicPr>
+          <p:nvPr/>
+        </p:nvPicPr>
+        <p:blipFill>
+          <a:blip r:embed="rId4"/>
+          <a:stretch>
+            <a:fillRect/>
+          </a:stretch>
+        </p:blipFill>
+        <p:spPr>
+          <a:xfrm>
+            <a:off x="6707903" y="144816"/>
+            <a:ext cx="2263537" cy="488784"/>
+          </a:xfrm>
+          <a:prstGeom prst="rect">
+            <a:avLst/>
+          </a:prstGeom>
+        </p:spPr>
+      </p:pic>
     </p:spTree>
   </p:cSld>
   <p:clrMapOvr>
